--- a/media/resources/files/Onduktar_BirdenAzBingo.pptx
+++ b/media/resources/files/Onduktar_BirdenAzBingo.pptx
@@ -7240,7 +7240,7 @@
                 <a:ea typeface="+mn-ea"/>
                 <a:cs typeface="+mn-cs"/>
               </a:rPr>
-              <a:t>Окуучулар </a:t>
+              <a:t>Окуучулар тордон тогуз жоопту тандап, дептердеги 3х3 чакмакка каалагандай коюшат.</a:t>
             </a:r>
             <a:r>
               <a:rPr kumimoji="0" lang="ru-RU" sz="2400" b="0" i="0" u="none" strike="noStrike" kern="1200" cap="none" spc="0" normalizeH="0" baseline="0" noProof="0" dirty="0">
@@ -7257,7 +7257,7 @@
                 <a:ea typeface="+mn-ea"/>
                 <a:cs typeface="+mn-cs"/>
               </a:rPr>
-              <a:t>суроо</a:t>
+              <a:t/>
             </a:r>
             <a:r>
               <a:rPr kumimoji="0" lang="en-US" sz="2400" b="0" i="0" u="none" strike="noStrike" kern="1200" cap="none" spc="0" normalizeH="0" baseline="0" noProof="0" dirty="0">
@@ -7274,7 +7274,7 @@
                 <a:ea typeface="+mn-ea"/>
                 <a:cs typeface="+mn-cs"/>
               </a:rPr>
-              <a:t> </a:t>
+              <a:t/>
             </a:r>
             <a:r>
               <a:rPr kumimoji="0" lang="en-US" sz="2400" b="0" i="0" u="none" strike="noStrike" kern="1200" cap="none" spc="0" normalizeH="0" baseline="0" noProof="0" dirty="0" err="1">
@@ -7291,7 +7291,7 @@
                 <a:ea typeface="+mn-ea"/>
                 <a:cs typeface="+mn-cs"/>
               </a:rPr>
-              <a:t>тордон</a:t>
+              <a:t/>
             </a:r>
             <a:r>
               <a:rPr kumimoji="0" lang="en-US" sz="2400" b="0" i="0" u="none" strike="noStrike" kern="1200" cap="none" spc="0" normalizeH="0" baseline="0" noProof="0" dirty="0">
@@ -7308,7 +7308,7 @@
                 <a:ea typeface="+mn-ea"/>
                 <a:cs typeface="+mn-cs"/>
               </a:rPr>
-              <a:t> </a:t>
+              <a:t/>
             </a:r>
             <a:r>
               <a:rPr kumimoji="0" lang="en-US" sz="2000" b="0" i="0" u="none" strike="noStrike" kern="1200" cap="none" spc="0" normalizeH="0" baseline="0" noProof="0" dirty="0" err="1">
@@ -7325,7 +7325,7 @@
                 <a:ea typeface="+mn-ea"/>
                 <a:cs typeface="+mn-cs"/>
               </a:rPr>
-              <a:t>тогуз</a:t>
+              <a:t/>
             </a:r>
             <a:r>
               <a:rPr kumimoji="0" lang="en-US" sz="2000" b="0" i="0" u="none" strike="noStrike" kern="1200" cap="none" spc="0" normalizeH="0" baseline="0" noProof="0" dirty="0">
@@ -7342,7 +7342,7 @@
                 <a:ea typeface="+mn-ea"/>
                 <a:cs typeface="+mn-cs"/>
               </a:rPr>
-              <a:t> </a:t>
+              <a:t/>
             </a:r>
             <a:r>
               <a:rPr kumimoji="0" lang="en-US" sz="2000" b="0" i="0" u="none" strike="noStrike" kern="1200" cap="none" spc="0" normalizeH="0" baseline="0" noProof="0" dirty="0" err="1">
@@ -7359,7 +7359,7 @@
                 <a:ea typeface="+mn-ea"/>
                 <a:cs typeface="+mn-cs"/>
               </a:rPr>
-              <a:t>жоопту</a:t>
+              <a:t/>
             </a:r>
             <a:r>
               <a:rPr kumimoji="0" lang="en-US" sz="2000" b="0" i="0" u="none" strike="noStrike" kern="1200" cap="none" spc="0" normalizeH="0" baseline="0" noProof="0" dirty="0">
@@ -7376,7 +7376,7 @@
                 <a:ea typeface="+mn-ea"/>
                 <a:cs typeface="+mn-cs"/>
               </a:rPr>
-              <a:t> </a:t>
+              <a:t/>
             </a:r>
             <a:r>
               <a:rPr kumimoji="0" lang="en-US" sz="2000" b="0" i="0" u="none" strike="noStrike" kern="1200" cap="none" spc="0" normalizeH="0" baseline="0" noProof="0" dirty="0" err="1">
@@ -7393,7 +7393,7 @@
                 <a:ea typeface="+mn-ea"/>
                 <a:cs typeface="+mn-cs"/>
               </a:rPr>
-              <a:t>тандап</a:t>
+              <a:t/>
             </a:r>
             <a:r>
               <a:rPr kumimoji="0" lang="en-US" sz="2000" b="0" i="0" u="none" strike="noStrike" kern="1200" cap="none" spc="0" normalizeH="0" baseline="0" noProof="0" dirty="0">
@@ -7410,7 +7410,7 @@
                 <a:ea typeface="+mn-ea"/>
                 <a:cs typeface="+mn-cs"/>
               </a:rPr>
-              <a:t>, </a:t>
+              <a:t/>
             </a:r>
             <a:r>
               <a:rPr kumimoji="0" lang="en-US" sz="2000" b="0" i="0" u="none" strike="noStrike" kern="1200" cap="none" spc="0" normalizeH="0" baseline="0" noProof="0" dirty="0" err="1">
@@ -7427,7 +7427,7 @@
                 <a:ea typeface="+mn-ea"/>
                 <a:cs typeface="+mn-cs"/>
               </a:rPr>
-              <a:t>аларды</a:t>
+              <a:t/>
             </a:r>
             <a:r>
               <a:rPr kumimoji="0" lang="en-US" sz="2000" b="0" i="0" u="none" strike="noStrike" kern="1200" cap="none" spc="0" normalizeH="0" baseline="0" noProof="0" dirty="0">
@@ -7444,7 +7444,7 @@
                 <a:ea typeface="+mn-ea"/>
                 <a:cs typeface="+mn-cs"/>
               </a:rPr>
-              <a:t> </a:t>
+              <a:t/>
             </a:r>
             <a:r>
               <a:rPr kumimoji="0" lang="ru-RU" sz="2000" b="0" i="0" u="none" strike="noStrike" kern="1200" cap="none" spc="0" normalizeH="0" baseline="0" noProof="0" dirty="0">
@@ -7461,7 +7461,7 @@
                 <a:ea typeface="+mn-ea"/>
                 <a:cs typeface="+mn-cs"/>
               </a:rPr>
-              <a:t>дептериндеги</a:t>
+              <a:t/>
             </a:r>
             <a:r>
               <a:rPr kumimoji="0" lang="en-US" sz="2000" b="0" i="0" u="none" strike="noStrike" kern="1200" cap="none" spc="0" normalizeH="0" baseline="0" noProof="0" dirty="0">
@@ -7478,7 +7478,7 @@
                 <a:ea typeface="+mn-ea"/>
                 <a:cs typeface="+mn-cs"/>
               </a:rPr>
-              <a:t> 3х3 </a:t>
+              <a:t/>
             </a:r>
             <a:r>
               <a:rPr kumimoji="0" lang="en-US" sz="2000" b="0" i="0" u="none" strike="noStrike" kern="1200" cap="none" spc="0" normalizeH="0" baseline="0" noProof="0" dirty="0" err="1">
@@ -7495,7 +7495,7 @@
                 <a:ea typeface="+mn-ea"/>
                 <a:cs typeface="+mn-cs"/>
               </a:rPr>
-              <a:t>квадратка</a:t>
+              <a:t/>
             </a:r>
             <a:r>
               <a:rPr kumimoji="0" lang="en-US" sz="2000" b="0" i="0" u="none" strike="noStrike" kern="1200" cap="none" spc="0" normalizeH="0" baseline="0" noProof="0" dirty="0">
@@ -7512,7 +7512,7 @@
                 <a:ea typeface="+mn-ea"/>
                 <a:cs typeface="+mn-cs"/>
               </a:rPr>
-              <a:t> </a:t>
+              <a:t/>
             </a:r>
             <a:r>
               <a:rPr kumimoji="0" lang="en-US" sz="2000" b="0" i="0" u="none" strike="noStrike" kern="1200" cap="none" spc="0" normalizeH="0" baseline="0" noProof="0" dirty="0" err="1">
@@ -7529,7 +7529,7 @@
                 <a:ea typeface="+mn-ea"/>
                 <a:cs typeface="+mn-cs"/>
               </a:rPr>
-              <a:t>туш</a:t>
+              <a:t/>
             </a:r>
             <a:r>
               <a:rPr kumimoji="0" lang="en-US" sz="2000" b="0" i="0" u="none" strike="noStrike" kern="1200" cap="none" spc="0" normalizeH="0" baseline="0" noProof="0" dirty="0">
@@ -7546,7 +7546,7 @@
                 <a:ea typeface="+mn-ea"/>
                 <a:cs typeface="+mn-cs"/>
               </a:rPr>
-              <a:t> </a:t>
+              <a:t/>
             </a:r>
             <a:r>
               <a:rPr kumimoji="0" lang="en-US" sz="2000" b="0" i="0" u="none" strike="noStrike" kern="1200" cap="none" spc="0" normalizeH="0" baseline="0" noProof="0" dirty="0" err="1">
@@ -7563,7 +7563,7 @@
                 <a:ea typeface="+mn-ea"/>
                 <a:cs typeface="+mn-cs"/>
               </a:rPr>
-              <a:t>келди</a:t>
+              <a:t/>
             </a:r>
             <a:r>
               <a:rPr kumimoji="0" lang="en-US" sz="2000" b="0" i="0" u="none" strike="noStrike" kern="1200" cap="none" spc="0" normalizeH="0" baseline="0" noProof="0" dirty="0">
@@ -7580,7 +7580,7 @@
                 <a:ea typeface="+mn-ea"/>
                 <a:cs typeface="+mn-cs"/>
               </a:rPr>
-              <a:t> </a:t>
+              <a:t/>
             </a:r>
             <a:r>
               <a:rPr kumimoji="0" lang="en-US" sz="2000" b="0" i="0" u="none" strike="noStrike" kern="1200" cap="none" spc="0" normalizeH="0" baseline="0" noProof="0" dirty="0" err="1">
@@ -7597,7 +7597,7 @@
                 <a:ea typeface="+mn-ea"/>
                 <a:cs typeface="+mn-cs"/>
               </a:rPr>
-              <a:t>жайгаштырышы</a:t>
+              <a:t/>
             </a:r>
             <a:r>
               <a:rPr kumimoji="0" lang="en-US" sz="2000" b="0" i="0" u="none" strike="noStrike" kern="1200" cap="none" spc="0" normalizeH="0" baseline="0" noProof="0" dirty="0">
@@ -7614,7 +7614,7 @@
                 <a:ea typeface="+mn-ea"/>
                 <a:cs typeface="+mn-cs"/>
               </a:rPr>
-              <a:t> </a:t>
+              <a:t/>
             </a:r>
             <a:r>
               <a:rPr kumimoji="0" lang="en-US" sz="2000" b="0" i="0" u="none" strike="noStrike" kern="1200" cap="none" spc="0" normalizeH="0" baseline="0" noProof="0" dirty="0" err="1">
@@ -7631,7 +7631,7 @@
                 <a:ea typeface="+mn-ea"/>
                 <a:cs typeface="+mn-cs"/>
               </a:rPr>
-              <a:t>керек</a:t>
+              <a:t/>
             </a:r>
             <a:r>
               <a:rPr kumimoji="0" lang="en-US" sz="2000" b="0" i="0" u="none" strike="noStrike" kern="1200" cap="none" spc="0" normalizeH="0" baseline="0" noProof="0" dirty="0">
@@ -7648,7 +7648,7 @@
                 <a:ea typeface="+mn-ea"/>
                 <a:cs typeface="+mn-cs"/>
               </a:rPr>
-              <a:t>.</a:t>
+              <a:t/>
             </a:r>
           </a:p>
           <a:p>
@@ -8965,7 +8965,7 @@
             <a:pPr algn="ctr"/>
             <a:r>
               <a:rPr lang="en-GB" sz="9600" dirty="0"/>
-              <a:t>18 ÷ 0.6</a:t>
+              <a:t>18 ÷ 0,6</a:t>
             </a:r>
           </a:p>
         </p:txBody>
@@ -9294,7 +9294,7 @@
             <a:pPr algn="ctr"/>
             <a:r>
               <a:rPr lang="en-GB" sz="9600" dirty="0"/>
-              <a:t>12 ÷ 0.8</a:t>
+              <a:t>12 ÷ 0,8</a:t>
             </a:r>
           </a:p>
         </p:txBody>
@@ -9623,7 +9623,7 @@
             <a:pPr algn="ctr"/>
             <a:r>
               <a:rPr lang="en-GB" sz="9600" dirty="0"/>
-              <a:t>24 ÷ 0.4</a:t>
+              <a:t>24 ÷ 0,4</a:t>
             </a:r>
           </a:p>
         </p:txBody>
@@ -9952,7 +9952,7 @@
             <a:pPr algn="ctr"/>
             <a:r>
               <a:rPr lang="en-GB" sz="9600" dirty="0"/>
-              <a:t>7 ÷ 0.2</a:t>
+              <a:t>7 ÷ 0,2</a:t>
             </a:r>
           </a:p>
         </p:txBody>
@@ -10281,7 +10281,7 @@
             <a:pPr algn="ctr"/>
             <a:r>
               <a:rPr lang="en-GB" sz="9600" dirty="0"/>
-              <a:t>24 ÷ 0.5</a:t>
+              <a:t>24 ÷ 0,5</a:t>
             </a:r>
           </a:p>
         </p:txBody>
@@ -10610,7 +10610,7 @@
             <a:pPr algn="ctr"/>
             <a:r>
               <a:rPr lang="en-GB" sz="9600" dirty="0"/>
-              <a:t>15 ÷ 0.2</a:t>
+              <a:t>15 ÷ 0,2</a:t>
             </a:r>
           </a:p>
         </p:txBody>
@@ -10939,7 +10939,7 @@
             <a:pPr algn="ctr"/>
             <a:r>
               <a:rPr lang="en-GB" sz="9600" dirty="0"/>
-              <a:t>4 ÷ 0.4</a:t>
+              <a:t>4 ÷ 0,4</a:t>
             </a:r>
           </a:p>
         </p:txBody>
@@ -11268,7 +11268,7 @@
             <a:pPr algn="ctr"/>
             <a:r>
               <a:rPr lang="en-GB" sz="9600" dirty="0"/>
-              <a:t>4 ÷ 0.2</a:t>
+              <a:t>4 ÷ 0,2</a:t>
             </a:r>
           </a:p>
         </p:txBody>
@@ -11597,7 +11597,7 @@
             <a:pPr algn="ctr"/>
             <a:r>
               <a:rPr lang="en-GB" sz="9600" dirty="0"/>
-              <a:t>3 ÷ 0.6</a:t>
+              <a:t>3 ÷ 0,6</a:t>
             </a:r>
           </a:p>
         </p:txBody>
@@ -11926,7 +11926,7 @@
             <a:pPr algn="ctr"/>
             <a:r>
               <a:rPr lang="en-GB" sz="9600" dirty="0"/>
-              <a:t>31 ÷ 0.5</a:t>
+              <a:t>31 ÷ 0,5</a:t>
             </a:r>
           </a:p>
         </p:txBody>
@@ -24373,7 +24373,7 @@
             <a:pPr algn="ctr"/>
             <a:r>
               <a:rPr lang="en-GB" sz="9600" dirty="0"/>
-              <a:t>40 ÷ 0.8</a:t>
+              <a:t>40 ÷ 0,8</a:t>
             </a:r>
           </a:p>
         </p:txBody>
@@ -24702,7 +24702,7 @@
             <a:pPr algn="ctr"/>
             <a:r>
               <a:rPr lang="en-GB" sz="9600" dirty="0"/>
-              <a:t>16 ÷ 0.4</a:t>
+              <a:t>16 ÷ 0,4</a:t>
             </a:r>
           </a:p>
         </p:txBody>
@@ -25031,7 +25031,7 @@
             <a:pPr algn="ctr"/>
             <a:r>
               <a:rPr lang="en-GB" sz="9600" dirty="0"/>
-              <a:t>24 ÷ 0.3</a:t>
+              <a:t>24 ÷ 0,3</a:t>
             </a:r>
           </a:p>
         </p:txBody>
@@ -25360,7 +25360,7 @@
             <a:pPr algn="ctr"/>
             <a:r>
               <a:rPr lang="en-GB" sz="9600" dirty="0"/>
-              <a:t>45 ÷ 0.3</a:t>
+              <a:t>45 ÷ 0,3</a:t>
             </a:r>
           </a:p>
         </p:txBody>
@@ -25689,7 +25689,7 @@
             <a:pPr algn="ctr"/>
             <a:r>
               <a:rPr lang="en-GB" sz="9600" dirty="0"/>
-              <a:t>20 ÷ 0.8</a:t>
+              <a:t>20 ÷ 0,8</a:t>
             </a:r>
           </a:p>
         </p:txBody>
@@ -26018,7 +26018,7 @@
             <a:pPr algn="ctr"/>
             <a:r>
               <a:rPr lang="en-GB" sz="9600" dirty="0"/>
-              <a:t>60 ÷ 0.3</a:t>
+              <a:t>60 ÷ 0,3</a:t>
             </a:r>
           </a:p>
         </p:txBody>
